--- a/docs/pptx/Ch12_SUPPLEMENT.pptx
+++ b/docs/pptx/Ch12_SUPPLEMENT.pptx
@@ -503,10 +503,18 @@
           <a:lstStyle/>
           <a:p>
             <a:r>
-              <a:rPr lang="en-US" dirty="0"/>
-              <a:t/>
-            </a:r>
-            <a:endParaRPr lang="en-US" dirty="0"/>
+              <a:t>PROF: Exercice — analyser 10 extraits de code et déterminer Big O.</a:t>
+            </a:r>
+          </a:p>
+          <a:p>
+            <a:r>
+              <a:t>Varier : boucles simples, imbriquées, logarithmiques, récursives.</a:t>
+            </a:r>
+          </a:p>
+          <a:p>
+            <a:r>
+              <a:t>Durée : 20 min individuel + 10 min correction.</a:t>
+            </a:r>
           </a:p>
         </p:txBody>
       </p:sp>
@@ -591,10 +599,18 @@
           <a:lstStyle/>
           <a:p>
             <a:r>
-              <a:rPr lang="en-US" dirty="0"/>
-              <a:t/>
-            </a:r>
-            <a:endParaRPr lang="en-US" dirty="0"/>
+              <a:t>PROF: Questions pièges :</a:t>
+            </a:r>
+          </a:p>
+          <a:p>
+            <a:r>
+              <a:t>'O(n + n) = ?' → O(n) (pas O(2n), les constantes disparaissent)</a:t>
+            </a:r>
+          </a:p>
+          <a:p>
+            <a:r>
+              <a:t>'O(n² + n) = ?' → O(n²) (terme dominant)</a:t>
+            </a:r>
           </a:p>
         </p:txBody>
       </p:sp>
@@ -679,10 +695,13 @@
           <a:lstStyle/>
           <a:p>
             <a:r>
-              <a:rPr lang="en-US" dirty="0"/>
-              <a:t/>
-            </a:r>
-            <a:endParaRPr lang="en-US" dirty="0"/>
+              <a:t>PROF: Récap O/Ω/Θ avec l'analogie du trajet.</a:t>
+            </a:r>
+          </a:p>
+          <a:p>
+            <a:r>
+              <a:t>O = 'pas plus de X heures', Ω = 'au moins X heures', Θ = 'exactement X heures'.</a:t>
+            </a:r>
           </a:p>
         </p:txBody>
       </p:sp>
